--- a/03-build/pptx/C4_U9_alumno.pptx
+++ b/03-build/pptx/C4_U9_alumno.pptx
@@ -4236,7 +4236,6 @@
               <a:srgbClr val="E4E3DE"/>
             </a:solidFill>
           </a:ln>
-          <a:effectLst/>
           <a:effectLst>
             <a:outerShdw blurRad="90000" dist="38000" dir="5400000" rotWithShape="0">
               <a:srgbClr val="20242E">
@@ -5653,7 +5652,6 @@
               <a:srgbClr val="D64550"/>
             </a:solidFill>
           </a:ln>
-          <a:effectLst/>
           <a:effectLst>
             <a:outerShdw blurRad="90000" dist="38000" dir="5400000" rotWithShape="0">
               <a:srgbClr val="20242E">
@@ -5841,7 +5839,6 @@
               <a:srgbClr val="E4E3DE"/>
             </a:solidFill>
           </a:ln>
-          <a:effectLst/>
           <a:effectLst>
             <a:outerShdw blurRad="90000" dist="38000" dir="5400000" rotWithShape="0">
               <a:srgbClr val="20242E">
@@ -6588,7 +6585,6 @@
               <a:srgbClr val="E4E3DE"/>
             </a:solidFill>
           </a:ln>
-          <a:effectLst/>
           <a:effectLst>
             <a:outerShdw blurRad="90000" dist="38000" dir="5400000" rotWithShape="0">
               <a:srgbClr val="20242E">
@@ -6732,7 +6728,6 @@
               <a:srgbClr val="E4E3DE"/>
             </a:solidFill>
           </a:ln>
-          <a:effectLst/>
           <a:effectLst>
             <a:outerShdw blurRad="90000" dist="38000" dir="5400000" rotWithShape="0">
               <a:srgbClr val="20242E">
@@ -6876,7 +6871,6 @@
               <a:srgbClr val="E4E3DE"/>
             </a:solidFill>
           </a:ln>
-          <a:effectLst/>
           <a:effectLst>
             <a:outerShdw blurRad="90000" dist="38000" dir="5400000" rotWithShape="0">
               <a:srgbClr val="20242E">
@@ -7020,7 +7014,6 @@
               <a:srgbClr val="E4E3DE"/>
             </a:solidFill>
           </a:ln>
-          <a:effectLst/>
           <a:effectLst>
             <a:outerShdw blurRad="90000" dist="38000" dir="5400000" rotWithShape="0">
               <a:srgbClr val="20242E">
@@ -7164,7 +7157,6 @@
               <a:srgbClr val="E4E3DE"/>
             </a:solidFill>
           </a:ln>
-          <a:effectLst/>
           <a:effectLst>
             <a:outerShdw blurRad="90000" dist="38000" dir="5400000" rotWithShape="0">
               <a:srgbClr val="20242E">
@@ -7308,7 +7300,6 @@
               <a:srgbClr val="E4E3DE"/>
             </a:solidFill>
           </a:ln>
-          <a:effectLst/>
           <a:effectLst>
             <a:outerShdw blurRad="90000" dist="38000" dir="5400000" rotWithShape="0">
               <a:srgbClr val="20242E">
@@ -7452,7 +7443,6 @@
               <a:srgbClr val="D64550"/>
             </a:solidFill>
           </a:ln>
-          <a:effectLst/>
           <a:effectLst>
             <a:outerShdw blurRad="90000" dist="38000" dir="5400000" rotWithShape="0">
               <a:srgbClr val="20242E">
@@ -8201,7 +8191,6 @@
               <a:srgbClr val="D64550"/>
             </a:solidFill>
           </a:ln>
-          <a:effectLst/>
           <a:effectLst>
             <a:outerShdw blurRad="90000" dist="38000" dir="5400000" rotWithShape="0">
               <a:srgbClr val="20242E">
@@ -9470,7 +9459,6 @@
               <a:srgbClr val="D64550"/>
             </a:solidFill>
           </a:ln>
-          <a:effectLst/>
           <a:effectLst>
             <a:outerShdw blurRad="90000" dist="38000" dir="5400000" rotWithShape="0">
               <a:srgbClr val="20242E">
@@ -9734,7 +9722,6 @@
               <a:srgbClr val="E4E3DE"/>
             </a:solidFill>
           </a:ln>
-          <a:effectLst/>
           <a:effectLst>
             <a:outerShdw blurRad="90000" dist="38000" dir="5400000" rotWithShape="0">
               <a:srgbClr val="20242E">
@@ -10437,7 +10424,6 @@
               <a:srgbClr val="E4E3DE"/>
             </a:solidFill>
           </a:ln>
-          <a:effectLst/>
           <a:effectLst>
             <a:outerShdw blurRad="90000" dist="38000" dir="5400000" rotWithShape="0">
               <a:srgbClr val="20242E">
@@ -10591,7 +10577,6 @@
               <a:srgbClr val="E4E3DE"/>
             </a:solidFill>
           </a:ln>
-          <a:effectLst/>
           <a:effectLst>
             <a:outerShdw blurRad="90000" dist="38000" dir="5400000" rotWithShape="0">
               <a:srgbClr val="20242E">
@@ -10745,7 +10730,6 @@
               <a:srgbClr val="E4E3DE"/>
             </a:solidFill>
           </a:ln>
-          <a:effectLst/>
           <a:effectLst>
             <a:outerShdw blurRad="90000" dist="38000" dir="5400000" rotWithShape="0">
               <a:srgbClr val="20242E">
@@ -10899,7 +10883,6 @@
               <a:srgbClr val="E4E3DE"/>
             </a:solidFill>
           </a:ln>
-          <a:effectLst/>
           <a:effectLst>
             <a:outerShdw blurRad="90000" dist="38000" dir="5400000" rotWithShape="0">
               <a:srgbClr val="20242E">
@@ -11053,7 +11036,6 @@
               <a:srgbClr val="E4E3DE"/>
             </a:solidFill>
           </a:ln>
-          <a:effectLst/>
           <a:effectLst>
             <a:outerShdw blurRad="90000" dist="38000" dir="5400000" rotWithShape="0">
               <a:srgbClr val="20242E">
@@ -11207,7 +11189,6 @@
               <a:srgbClr val="E4E3DE"/>
             </a:solidFill>
           </a:ln>
-          <a:effectLst/>
           <a:effectLst>
             <a:outerShdw blurRad="90000" dist="38000" dir="5400000" rotWithShape="0">
               <a:srgbClr val="20242E">
@@ -11361,7 +11342,6 @@
               <a:srgbClr val="E4E3DE"/>
             </a:solidFill>
           </a:ln>
-          <a:effectLst/>
           <a:effectLst>
             <a:outerShdw blurRad="90000" dist="38000" dir="5400000" rotWithShape="0">
               <a:srgbClr val="20242E">
@@ -11515,7 +11495,6 @@
               <a:srgbClr val="E4E3DE"/>
             </a:solidFill>
           </a:ln>
-          <a:effectLst/>
           <a:effectLst>
             <a:outerShdw blurRad="90000" dist="38000" dir="5400000" rotWithShape="0">
               <a:srgbClr val="20242E">
@@ -11669,7 +11648,6 @@
               <a:srgbClr val="E4E3DE"/>
             </a:solidFill>
           </a:ln>
-          <a:effectLst/>
           <a:effectLst>
             <a:outerShdw blurRad="90000" dist="38000" dir="5400000" rotWithShape="0">
               <a:srgbClr val="20242E">
@@ -11823,7 +11801,6 @@
               <a:srgbClr val="E4E3DE"/>
             </a:solidFill>
           </a:ln>
-          <a:effectLst/>
           <a:effectLst>
             <a:outerShdw blurRad="90000" dist="38000" dir="5400000" rotWithShape="0">
               <a:srgbClr val="20242E">
@@ -11977,7 +11954,6 @@
               <a:srgbClr val="E4E3DE"/>
             </a:solidFill>
           </a:ln>
-          <a:effectLst/>
           <a:effectLst>
             <a:outerShdw blurRad="90000" dist="38000" dir="5400000" rotWithShape="0">
               <a:srgbClr val="20242E">
@@ -12131,7 +12107,6 @@
               <a:srgbClr val="E4E3DE"/>
             </a:solidFill>
           </a:ln>
-          <a:effectLst/>
           <a:effectLst>
             <a:outerShdw blurRad="90000" dist="38000" dir="5400000" rotWithShape="0">
               <a:srgbClr val="20242E">
@@ -12285,7 +12260,6 @@
               <a:srgbClr val="E4E3DE"/>
             </a:solidFill>
           </a:ln>
-          <a:effectLst/>
           <a:effectLst>
             <a:outerShdw blurRad="90000" dist="38000" dir="5400000" rotWithShape="0">
               <a:srgbClr val="20242E">
@@ -12439,7 +12413,6 @@
               <a:srgbClr val="E4E3DE"/>
             </a:solidFill>
           </a:ln>
-          <a:effectLst/>
           <a:effectLst>
             <a:outerShdw blurRad="90000" dist="38000" dir="5400000" rotWithShape="0">
               <a:srgbClr val="20242E">
@@ -12593,7 +12566,6 @@
               <a:srgbClr val="E4E3DE"/>
             </a:solidFill>
           </a:ln>
-          <a:effectLst/>
           <a:effectLst>
             <a:outerShdw blurRad="90000" dist="38000" dir="5400000" rotWithShape="0">
               <a:srgbClr val="20242E">
@@ -12747,7 +12719,6 @@
               <a:srgbClr val="E4E3DE"/>
             </a:solidFill>
           </a:ln>
-          <a:effectLst/>
           <a:effectLst>
             <a:outerShdw blurRad="90000" dist="38000" dir="5400000" rotWithShape="0">
               <a:srgbClr val="20242E">
@@ -12901,7 +12872,6 @@
               <a:srgbClr val="E4E3DE"/>
             </a:solidFill>
           </a:ln>
-          <a:effectLst/>
           <a:effectLst>
             <a:outerShdw blurRad="90000" dist="38000" dir="5400000" rotWithShape="0">
               <a:srgbClr val="20242E">
@@ -13055,7 +13025,6 @@
               <a:srgbClr val="D64550"/>
             </a:solidFill>
           </a:ln>
-          <a:effectLst/>
           <a:effectLst>
             <a:outerShdw blurRad="90000" dist="38000" dir="5400000" rotWithShape="0">
               <a:srgbClr val="20242E">
@@ -13209,7 +13178,6 @@
               <a:srgbClr val="D64550"/>
             </a:solidFill>
           </a:ln>
-          <a:effectLst/>
           <a:effectLst>
             <a:outerShdw blurRad="90000" dist="38000" dir="5400000" rotWithShape="0">
               <a:srgbClr val="20242E">
@@ -13363,7 +13331,6 @@
               <a:srgbClr val="D64550"/>
             </a:solidFill>
           </a:ln>
-          <a:effectLst/>
           <a:effectLst>
             <a:outerShdw blurRad="90000" dist="38000" dir="5400000" rotWithShape="0">
               <a:srgbClr val="20242E">
@@ -14000,7 +13967,6 @@
               <a:srgbClr val="E4E3DE"/>
             </a:solidFill>
           </a:ln>
-          <a:effectLst/>
           <a:effectLst>
             <a:outerShdw blurRad="90000" dist="38000" dir="5400000" rotWithShape="0">
               <a:srgbClr val="20242E">
@@ -14298,7 +14264,6 @@
               <a:srgbClr val="DC2626"/>
             </a:solidFill>
           </a:ln>
-          <a:effectLst/>
           <a:effectLst>
             <a:outerShdw blurRad="90000" dist="38000" dir="5400000" rotWithShape="0">
               <a:srgbClr val="20242E">
@@ -14465,7 +14430,6 @@
               <a:srgbClr val="D64550"/>
             </a:solidFill>
           </a:ln>
-          <a:effectLst/>
           <a:effectLst>
             <a:outerShdw blurRad="90000" dist="38000" dir="5400000" rotWithShape="0">
               <a:srgbClr val="20242E">
@@ -15441,7 +15405,6 @@
               <a:srgbClr val="E4E3DE"/>
             </a:solidFill>
           </a:ln>
-          <a:effectLst/>
           <a:effectLst>
             <a:outerShdw blurRad="90000" dist="38000" dir="5400000" rotWithShape="0">
               <a:srgbClr val="20242E">
@@ -15610,7 +15573,6 @@
               <a:srgbClr val="E4E3DE"/>
             </a:solidFill>
           </a:ln>
-          <a:effectLst/>
           <a:effectLst>
             <a:outerShdw blurRad="90000" dist="38000" dir="5400000" rotWithShape="0">
               <a:srgbClr val="20242E">
@@ -15779,7 +15741,6 @@
               <a:srgbClr val="E4E3DE"/>
             </a:solidFill>
           </a:ln>
-          <a:effectLst/>
           <a:effectLst>
             <a:outerShdw blurRad="90000" dist="38000" dir="5400000" rotWithShape="0">
               <a:srgbClr val="20242E">
@@ -15948,7 +15909,6 @@
               <a:srgbClr val="E4E3DE"/>
             </a:solidFill>
           </a:ln>
-          <a:effectLst/>
           <a:effectLst>
             <a:outerShdw blurRad="90000" dist="38000" dir="5400000" rotWithShape="0">
               <a:srgbClr val="20242E">
@@ -16117,7 +16077,6 @@
               <a:srgbClr val="E4E3DE"/>
             </a:solidFill>
           </a:ln>
-          <a:effectLst/>
           <a:effectLst>
             <a:outerShdw blurRad="90000" dist="38000" dir="5400000" rotWithShape="0">
               <a:srgbClr val="20242E">
@@ -16286,7 +16245,6 @@
               <a:srgbClr val="E4E3DE"/>
             </a:solidFill>
           </a:ln>
-          <a:effectLst/>
           <a:effectLst>
             <a:outerShdw blurRad="90000" dist="38000" dir="5400000" rotWithShape="0">
               <a:srgbClr val="20242E">
@@ -16455,7 +16413,6 @@
               <a:srgbClr val="E4E3DE"/>
             </a:solidFill>
           </a:ln>
-          <a:effectLst/>
           <a:effectLst>
             <a:outerShdw blurRad="90000" dist="38000" dir="5400000" rotWithShape="0">
               <a:srgbClr val="20242E">
@@ -16624,7 +16581,6 @@
               <a:srgbClr val="E4E3DE"/>
             </a:solidFill>
           </a:ln>
-          <a:effectLst/>
           <a:effectLst>
             <a:outerShdw blurRad="90000" dist="38000" dir="5400000" rotWithShape="0">
               <a:srgbClr val="20242E">
@@ -16793,7 +16749,6 @@
               <a:srgbClr val="E4E3DE"/>
             </a:solidFill>
           </a:ln>
-          <a:effectLst/>
           <a:effectLst>
             <a:outerShdw blurRad="90000" dist="38000" dir="5400000" rotWithShape="0">
               <a:srgbClr val="20242E">
@@ -16962,7 +16917,6 @@
               <a:srgbClr val="E4E3DE"/>
             </a:solidFill>
           </a:ln>
-          <a:effectLst/>
           <a:effectLst>
             <a:outerShdw blurRad="90000" dist="38000" dir="5400000" rotWithShape="0">
               <a:srgbClr val="20242E">
@@ -17711,7 +17665,6 @@
               <a:srgbClr val="E4E3DE"/>
             </a:solidFill>
           </a:ln>
-          <a:effectLst/>
           <a:effectLst>
             <a:outerShdw blurRad="90000" dist="38000" dir="5400000" rotWithShape="0">
               <a:srgbClr val="20242E">
@@ -19566,7 +19519,6 @@
               <a:srgbClr val="D64550"/>
             </a:solidFill>
           </a:ln>
-          <a:effectLst/>
           <a:effectLst>
             <a:outerShdw blurRad="90000" dist="38000" dir="5400000" rotWithShape="0">
               <a:srgbClr val="20242E">
@@ -20394,7 +20346,6 @@
               <a:srgbClr val="E4E3DE"/>
             </a:solidFill>
           </a:ln>
-          <a:effectLst/>
           <a:effectLst>
             <a:outerShdw blurRad="90000" dist="38000" dir="5400000" rotWithShape="0">
               <a:srgbClr val="20242E">
@@ -20731,7 +20682,6 @@
               <a:srgbClr val="E4E3DE"/>
             </a:solidFill>
           </a:ln>
-          <a:effectLst/>
           <a:effectLst>
             <a:outerShdw blurRad="90000" dist="38000" dir="5400000" rotWithShape="0">
               <a:srgbClr val="20242E">
@@ -21050,7 +21000,6 @@
               <a:srgbClr val="D64550"/>
             </a:solidFill>
           </a:ln>
-          <a:effectLst/>
           <a:effectLst>
             <a:outerShdw blurRad="90000" dist="38000" dir="5400000" rotWithShape="0">
               <a:srgbClr val="20242E">
@@ -22849,7 +22798,6 @@
               <a:srgbClr val="A8323B"/>
             </a:solidFill>
           </a:ln>
-          <a:effectLst/>
           <a:effectLst>
             <a:outerShdw blurRad="90000" dist="38000" dir="5400000" rotWithShape="0">
               <a:srgbClr val="20242E">
@@ -23333,7 +23281,6 @@
               <a:srgbClr val="A8323B"/>
             </a:solidFill>
           </a:ln>
-          <a:effectLst/>
           <a:effectLst>
             <a:outerShdw blurRad="90000" dist="38000" dir="5400000" rotWithShape="0">
               <a:srgbClr val="20242E">
@@ -23429,7 +23376,6 @@
               <a:srgbClr val="D64550"/>
             </a:solidFill>
           </a:ln>
-          <a:effectLst/>
           <a:effectLst>
             <a:outerShdw blurRad="90000" dist="38000" dir="5400000" rotWithShape="0">
               <a:srgbClr val="20242E">
@@ -24832,7 +24778,6 @@
               <a:srgbClr val="E4E3DE"/>
             </a:solidFill>
           </a:ln>
-          <a:effectLst/>
           <a:effectLst>
             <a:outerShdw blurRad="90000" dist="38000" dir="5400000" rotWithShape="0">
               <a:srgbClr val="20242E">
@@ -25256,7 +25201,6 @@
               <a:srgbClr val="E4E3DE"/>
             </a:solidFill>
           </a:ln>
-          <a:effectLst/>
           <a:effectLst>
             <a:outerShdw blurRad="90000" dist="38000" dir="5400000" rotWithShape="0">
               <a:srgbClr val="20242E">
@@ -25680,7 +25624,6 @@
               <a:srgbClr val="E4E3DE"/>
             </a:solidFill>
           </a:ln>
-          <a:effectLst/>
           <a:effectLst>
             <a:outerShdw blurRad="90000" dist="38000" dir="5400000" rotWithShape="0">
               <a:srgbClr val="20242E">
@@ -26632,7 +26575,6 @@
               <a:srgbClr val="D64550"/>
             </a:solidFill>
           </a:ln>
-          <a:effectLst/>
           <a:effectLst>
             <a:outerShdw blurRad="90000" dist="38000" dir="5400000" rotWithShape="0">
               <a:srgbClr val="20242E">
@@ -27002,7 +26944,6 @@
               <a:srgbClr val="E4E3DE"/>
             </a:solidFill>
           </a:ln>
-          <a:effectLst/>
           <a:effectLst>
             <a:outerShdw blurRad="90000" dist="38000" dir="5400000" rotWithShape="0">
               <a:srgbClr val="20242E">
@@ -28454,7 +28395,6 @@
               <a:srgbClr val="E4E3DE"/>
             </a:solidFill>
           </a:ln>
-          <a:effectLst/>
           <a:effectLst>
             <a:outerShdw blurRad="90000" dist="38000" dir="5400000" rotWithShape="0">
               <a:srgbClr val="20242E">
@@ -29365,7 +29305,6 @@
               <a:srgbClr val="D64550"/>
             </a:solidFill>
           </a:ln>
-          <a:effectLst/>
           <a:effectLst>
             <a:outerShdw blurRad="90000" dist="38000" dir="5400000" rotWithShape="0">
               <a:srgbClr val="20242E">
@@ -30297,7 +30236,6 @@
               <a:srgbClr val="E4E3DE"/>
             </a:solidFill>
           </a:ln>
-          <a:effectLst/>
           <a:effectLst>
             <a:outerShdw blurRad="90000" dist="38000" dir="5400000" rotWithShape="0">
               <a:srgbClr val="20242E">
@@ -30586,7 +30524,6 @@
               <a:srgbClr val="E4E3DE"/>
             </a:solidFill>
           </a:ln>
-          <a:effectLst/>
           <a:effectLst>
             <a:outerShdw blurRad="90000" dist="38000" dir="5400000" rotWithShape="0">
               <a:srgbClr val="20242E">
@@ -30956,7 +30893,6 @@
               <a:srgbClr val="DC2626"/>
             </a:solidFill>
           </a:ln>
-          <a:effectLst/>
           <a:effectLst>
             <a:outerShdw blurRad="90000" dist="38000" dir="5400000" rotWithShape="0">
               <a:srgbClr val="20242E">
@@ -31178,7 +31114,6 @@
               <a:srgbClr val="DC2626"/>
             </a:solidFill>
           </a:ln>
-          <a:effectLst/>
           <a:effectLst>
             <a:outerShdw blurRad="90000" dist="38000" dir="5400000" rotWithShape="0">
               <a:srgbClr val="20242E">
@@ -31427,7 +31362,6 @@
               <a:srgbClr val="D64550"/>
             </a:solidFill>
           </a:ln>
-          <a:effectLst/>
           <a:effectLst>
             <a:outerShdw blurRad="90000" dist="38000" dir="5400000" rotWithShape="0">
               <a:srgbClr val="20242E">
